--- a/CERTIFICATE_TEMPLATE - Recognition .pptx
+++ b/CERTIFICATE_TEMPLATE - Recognition .pptx
@@ -3497,7 +3497,7 @@
         </p:nvSpPr>
         <p:spPr>
           <a:xfrm>
-            <a:off x="0" y="76200"/>
+            <a:off x="0" y="0"/>
             <a:ext cx="10693400" cy="7605395"/>
           </a:xfrm>
           <a:custGeom>
